--- a/u_sharp/7 Аналитика.pptx
+++ b/u_sharp/7 Аналитика.pptx
@@ -194,7 +194,8 @@
           <a:p>
             <a:fld id="{8AA03973-5453-40EA-9151-C4A03143E901}" type="datetimeFigureOut">
               <a:rPr lang="ru-RU" smtClean="0"/>
-              <a:t>28.01.2025</a:t>
+              <a:pPr/>
+              <a:t>21.04.2026</a:t>
             </a:fld>
             <a:endParaRPr lang="ru-RU"/>
           </a:p>
@@ -355,6 +356,7 @@
           <a:p>
             <a:fld id="{3382F739-C562-404E-BF21-11A8E7F0E52B}" type="slidenum">
               <a:rPr lang="ru-RU" smtClean="0"/>
+              <a:pPr/>
               <a:t>‹#›</a:t>
             </a:fld>
             <a:endParaRPr lang="ru-RU"/>
@@ -526,6 +528,7 @@
           <a:p>
             <a:fld id="{3382F739-C562-404E-BF21-11A8E7F0E52B}" type="slidenum">
               <a:rPr lang="ru-RU" smtClean="0"/>
+              <a:pPr/>
               <a:t>3</a:t>
             </a:fld>
             <a:endParaRPr lang="ru-RU"/>
@@ -722,7 +725,7 @@
             <a:fld id="{777C72D1-151D-4B33-9F5C-C598F99D6FCE}" type="datetimeFigureOut">
               <a:rPr lang="ru-RU" smtClean="0"/>
               <a:pPr/>
-              <a:t>28.01.2025</a:t>
+              <a:t>21.04.2026</a:t>
             </a:fld>
             <a:endParaRPr lang="ru-RU"/>
           </a:p>
@@ -889,7 +892,7 @@
             <a:fld id="{777C72D1-151D-4B33-9F5C-C598F99D6FCE}" type="datetimeFigureOut">
               <a:rPr lang="ru-RU" smtClean="0"/>
               <a:pPr/>
-              <a:t>28.01.2025</a:t>
+              <a:t>21.04.2026</a:t>
             </a:fld>
             <a:endParaRPr lang="ru-RU"/>
           </a:p>
@@ -1066,7 +1069,7 @@
             <a:fld id="{777C72D1-151D-4B33-9F5C-C598F99D6FCE}" type="datetimeFigureOut">
               <a:rPr lang="ru-RU" smtClean="0"/>
               <a:pPr/>
-              <a:t>28.01.2025</a:t>
+              <a:t>21.04.2026</a:t>
             </a:fld>
             <a:endParaRPr lang="ru-RU"/>
           </a:p>
@@ -1233,7 +1236,7 @@
             <a:fld id="{777C72D1-151D-4B33-9F5C-C598F99D6FCE}" type="datetimeFigureOut">
               <a:rPr lang="ru-RU" smtClean="0"/>
               <a:pPr/>
-              <a:t>28.01.2025</a:t>
+              <a:t>21.04.2026</a:t>
             </a:fld>
             <a:endParaRPr lang="ru-RU"/>
           </a:p>
@@ -1476,7 +1479,7 @@
             <a:fld id="{777C72D1-151D-4B33-9F5C-C598F99D6FCE}" type="datetimeFigureOut">
               <a:rPr lang="ru-RU" smtClean="0"/>
               <a:pPr/>
-              <a:t>28.01.2025</a:t>
+              <a:t>21.04.2026</a:t>
             </a:fld>
             <a:endParaRPr lang="ru-RU"/>
           </a:p>
@@ -1761,7 +1764,7 @@
             <a:fld id="{777C72D1-151D-4B33-9F5C-C598F99D6FCE}" type="datetimeFigureOut">
               <a:rPr lang="ru-RU" smtClean="0"/>
               <a:pPr/>
-              <a:t>28.01.2025</a:t>
+              <a:t>21.04.2026</a:t>
             </a:fld>
             <a:endParaRPr lang="ru-RU"/>
           </a:p>
@@ -2180,7 +2183,7 @@
             <a:fld id="{777C72D1-151D-4B33-9F5C-C598F99D6FCE}" type="datetimeFigureOut">
               <a:rPr lang="ru-RU" smtClean="0"/>
               <a:pPr/>
-              <a:t>28.01.2025</a:t>
+              <a:t>21.04.2026</a:t>
             </a:fld>
             <a:endParaRPr lang="ru-RU"/>
           </a:p>
@@ -2295,7 +2298,7 @@
             <a:fld id="{777C72D1-151D-4B33-9F5C-C598F99D6FCE}" type="datetimeFigureOut">
               <a:rPr lang="ru-RU" smtClean="0"/>
               <a:pPr/>
-              <a:t>28.01.2025</a:t>
+              <a:t>21.04.2026</a:t>
             </a:fld>
             <a:endParaRPr lang="ru-RU"/>
           </a:p>
@@ -2387,7 +2390,7 @@
             <a:fld id="{777C72D1-151D-4B33-9F5C-C598F99D6FCE}" type="datetimeFigureOut">
               <a:rPr lang="ru-RU" smtClean="0"/>
               <a:pPr/>
-              <a:t>28.01.2025</a:t>
+              <a:t>21.04.2026</a:t>
             </a:fld>
             <a:endParaRPr lang="ru-RU"/>
           </a:p>
@@ -2661,7 +2664,7 @@
             <a:fld id="{777C72D1-151D-4B33-9F5C-C598F99D6FCE}" type="datetimeFigureOut">
               <a:rPr lang="ru-RU" smtClean="0"/>
               <a:pPr/>
-              <a:t>28.01.2025</a:t>
+              <a:t>21.04.2026</a:t>
             </a:fld>
             <a:endParaRPr lang="ru-RU"/>
           </a:p>
@@ -2911,7 +2914,7 @@
             <a:fld id="{777C72D1-151D-4B33-9F5C-C598F99D6FCE}" type="datetimeFigureOut">
               <a:rPr lang="ru-RU" smtClean="0"/>
               <a:pPr/>
-              <a:t>28.01.2025</a:t>
+              <a:t>21.04.2026</a:t>
             </a:fld>
             <a:endParaRPr lang="ru-RU"/>
           </a:p>
@@ -3121,7 +3124,7 @@
             <a:fld id="{777C72D1-151D-4B33-9F5C-C598F99D6FCE}" type="datetimeFigureOut">
               <a:rPr lang="ru-RU" smtClean="0"/>
               <a:pPr/>
-              <a:t>28.01.2025</a:t>
+              <a:t>21.04.2026</a:t>
             </a:fld>
             <a:endParaRPr lang="ru-RU"/>
           </a:p>
@@ -4055,14 +4058,7 @@
                 <a:latin typeface="Times New Roman" pitchFamily="18" charset="0"/>
                 <a:cs typeface="Times New Roman" pitchFamily="18" charset="0"/>
               </a:rPr>
-              <a:t>работе </a:t>
-            </a:r>
-            <a:r>
-              <a:rPr lang="ru-RU" sz="2800" dirty="0" smtClean="0">
-                <a:latin typeface="Times New Roman" pitchFamily="18" charset="0"/>
-                <a:cs typeface="Times New Roman" pitchFamily="18" charset="0"/>
-              </a:rPr>
-              <a:t>аналитическими возможностями библиотеки </a:t>
+              <a:t>работе аналитическими возможностями библиотеки </a:t>
             </a:r>
             <a:r>
               <a:rPr lang="en-US" sz="2800" dirty="0" smtClean="0">
@@ -4076,21 +4072,7 @@
                 <a:latin typeface="Times New Roman" pitchFamily="18" charset="0"/>
                 <a:cs typeface="Times New Roman" pitchFamily="18" charset="0"/>
               </a:rPr>
-              <a:t> </a:t>
-            </a:r>
-            <a:r>
-              <a:rPr lang="ru-RU" sz="2800" dirty="0" smtClean="0">
-                <a:latin typeface="Times New Roman" pitchFamily="18" charset="0"/>
-                <a:cs typeface="Times New Roman" pitchFamily="18" charset="0"/>
-              </a:rPr>
-              <a:t>можно получить </a:t>
-            </a:r>
-            <a:r>
-              <a:rPr lang="ru-RU" sz="2800" dirty="0" smtClean="0">
-                <a:latin typeface="Times New Roman" pitchFamily="18" charset="0"/>
-                <a:cs typeface="Times New Roman" pitchFamily="18" charset="0"/>
-              </a:rPr>
-              <a:t>в мануале</a:t>
+              <a:t> можно получить в мануале</a:t>
             </a:r>
             <a:r>
               <a:rPr lang="en-US" sz="2800" dirty="0" smtClean="0">
@@ -4098,6 +4080,20 @@
                 <a:cs typeface="Times New Roman" pitchFamily="18" charset="0"/>
               </a:rPr>
               <a:t> </a:t>
+            </a:r>
+            <a:r>
+              <a:rPr lang="en-US" sz="2800" dirty="0" smtClean="0">
+                <a:latin typeface="Times New Roman" pitchFamily="18" charset="0"/>
+                <a:cs typeface="Times New Roman" pitchFamily="18" charset="0"/>
+              </a:rPr>
+              <a:t> </a:t>
+            </a:r>
+            <a:r>
+              <a:rPr lang="ru-RU" sz="2800" dirty="0" smtClean="0">
+                <a:latin typeface="Times New Roman" pitchFamily="18" charset="0"/>
+                <a:cs typeface="Times New Roman" pitchFamily="18" charset="0"/>
+              </a:rPr>
+              <a:t>и сети Интернет</a:t>
             </a:r>
             <a:endParaRPr lang="ru-RU" sz="2800" b="1" dirty="0" smtClean="0">
               <a:latin typeface="Times New Roman" pitchFamily="18" charset="0"/>
